--- a/exportados/semana-06/Presentacion_Integrador_Anemia_Junin.pptx
+++ b/exportados/semana-06/Presentacion_Integrador_Anemia_Junin.pptx
@@ -538,7 +538,7 @@
           </a:p>
           <a:p>
             <a:r>
-              <a:t>Cifras: DATOS_PMV §1 y Informe §2.1 (Tabla 4 y Tabla 6).</a:t>
+              <a:t>Cifras: Informe §2.1 (Tabla 4 y Tabla 6).</a:t>
             </a:r>
           </a:p>
         </p:txBody>
@@ -708,7 +708,7 @@
           <a:lstStyle/>
           <a:p>
             <a:r>
-              <a:t>[Expone: Auqui H. (Ingeniero de Desarrollo y Prototipado; arquitectura). Tiempo: 1:05. Acumulado 3:15]</a:t>
+              <a:t>[Expone: Auqui H. (Ingeniera de Desarrollo y Prototipado; arquitectura). Tiempo: 1:05. Acumulado 3:15]</a:t>
             </a:r>
           </a:p>
           <a:p>
@@ -738,7 +738,7 @@
           </a:p>
           <a:p>
             <a:r>
-              <a:t>Cifras: DATOS_PMV §3, §4, §13; Informe §3.2.</a:t>
+              <a:t>Cifras: Informe §3.2.</a:t>
             </a:r>
           </a:p>
         </p:txBody>
@@ -838,7 +838,7 @@
           </a:p>
           <a:p>
             <a:r>
-              <a:t>Cifras: DATOS_PMV §6 a §9 y §17; Informe §3.3.</a:t>
+              <a:t>Cifras: Informe §3.3.</a:t>
             </a:r>
           </a:p>
         </p:txBody>
@@ -1048,12 +1048,7 @@
           </a:p>
           <a:p>
             <a:r>
-              <a:t>Cifras: DATOS_PMV §8; Informe §2.3 (Tablas 14 y 18, Figuras 12 a 14).</a:t>
-            </a:r>
-          </a:p>
-          <a:p>
-            <a:r>
-              <a:t>Nota (C-10): los SP por HU del tablero del PMV (5,3,3,2,3,5) difieren del desglose de S3-4; usar los de S3-4 (13 + 8).</a:t>
+              <a:t>Cifras: Informe §2.3 (Tablas 14 y 18, Figuras 12 a 14).</a:t>
             </a:r>
           </a:p>
         </p:txBody>
@@ -4249,104 +4244,9 @@
           </a:p>
         </p:txBody>
       </p:sp>
-      <p:sp>
-        <p:nvSpPr>
-          <p:cNvPr id="4" name="TextBox 3"/>
-          <p:cNvSpPr txBox="1"/>
-          <p:nvPr/>
-        </p:nvSpPr>
-        <p:spPr>
-          <a:xfrm>
-            <a:off x="365760" y="5303520"/>
-            <a:ext cx="11460175" cy="1417320"/>
-          </a:xfrm>
-          <a:prstGeom prst="rect">
-            <a:avLst/>
-          </a:prstGeom>
-          <a:noFill/>
-        </p:spPr>
-        <p:txBody>
-          <a:bodyPr wrap="square" anchor="ctr">
-            <a:spAutoFit/>
-          </a:bodyPr>
-          <a:lstStyle/>
-          <a:p>
-            <a:pPr algn="ctr"/>
-            <a:r>
-              <a:rPr sz="2000" b="0">
-                <a:solidFill>
-                  <a:srgbClr val="1B2A3A"/>
-                </a:solidFill>
-                <a:latin typeface="Calibri"/>
-              </a:rPr>
-              <a:t>Brechas </a:t>
-            </a:r>
-            <a:r>
-              <a:rPr sz="2000" b="1">
-                <a:solidFill>
-                  <a:srgbClr val="0B5C75"/>
-                </a:solidFill>
-                <a:latin typeface="Calibri"/>
-              </a:rPr>
-              <a:t>B1–B6</a:t>
-            </a:r>
-            <a:r>
-              <a:rPr sz="2000" b="0">
-                <a:solidFill>
-                  <a:srgbClr val="1B2A3A"/>
-                </a:solidFill>
-                <a:latin typeface="Calibri"/>
-              </a:rPr>
-              <a:t> · Datos ➔ Software ➔ Decisión ➔ Impacto</a:t>
-            </a:r>
-          </a:p>
-          <a:p>
-            <a:pPr algn="ctr"/>
-            <a:r>
-              <a:rPr sz="2000" b="0">
-                <a:solidFill>
-                  <a:srgbClr val="1B2A3A"/>
-                </a:solidFill>
-                <a:latin typeface="Calibri"/>
-              </a:rPr>
-              <a:t>Valor: </a:t>
-            </a:r>
-            <a:r>
-              <a:rPr sz="2000" b="1">
-                <a:solidFill>
-                  <a:srgbClr val="0B5C75"/>
-                </a:solidFill>
-                <a:latin typeface="Calibri"/>
-              </a:rPr>
-              <a:t>3 registros → 1</a:t>
-            </a:r>
-            <a:r>
-              <a:rPr sz="2000" b="0">
-                <a:solidFill>
-                  <a:srgbClr val="1B2A3A"/>
-                </a:solidFill>
-                <a:latin typeface="Calibri"/>
-              </a:rPr>
-              <a:t> por evaluación (sintético)</a:t>
-            </a:r>
-          </a:p>
-          <a:p>
-            <a:pPr algn="ctr"/>
-            <a:r>
-              <a:rPr sz="2000" b="0">
-                <a:solidFill>
-                  <a:srgbClr val="1B2A3A"/>
-                </a:solidFill>
-                <a:latin typeface="Calibri"/>
-              </a:rPr>
-              <a:t>Anemia Junín · Procesos de Software 2026-20 · Porras · Auqui · Huamani</a:t>
-            </a:r>
-          </a:p>
-        </p:txBody>
-      </p:sp>
       <p:pic>
         <p:nvPicPr>
-          <p:cNvPr id="5" name="Picture 4" descr="50_s6_as_is_vs_to_be.png"/>
+          <p:cNvPr id="4" name="Picture 3" descr="50_s6_as_is_vs_to_be_16x9.png"/>
           <p:cNvPicPr>
             <a:picLocks noChangeAspect="1"/>
           </p:cNvPicPr>
@@ -4360,14 +4260,128 @@
         </p:blipFill>
         <p:spPr>
           <a:xfrm>
-            <a:off x="4730460" y="1097280"/>
-            <a:ext cx="2730773" cy="4114800"/>
+            <a:off x="137160" y="1097280"/>
+            <a:ext cx="9784080" cy="5505768"/>
           </a:xfrm>
           <a:prstGeom prst="rect">
             <a:avLst/>
           </a:prstGeom>
         </p:spPr>
       </p:pic>
+      <p:sp>
+        <p:nvSpPr>
+          <p:cNvPr id="5" name="TextBox 4"/>
+          <p:cNvSpPr txBox="1"/>
+          <p:nvPr/>
+        </p:nvSpPr>
+        <p:spPr>
+          <a:xfrm>
+            <a:off x="10012680" y="1280160"/>
+            <a:ext cx="2057400" cy="4572000"/>
+          </a:xfrm>
+          <a:prstGeom prst="rect">
+            <a:avLst/>
+          </a:prstGeom>
+          <a:noFill/>
+        </p:spPr>
+        <p:txBody>
+          <a:bodyPr wrap="square" anchor="t">
+            <a:spAutoFit/>
+          </a:bodyPr>
+          <a:lstStyle/>
+          <a:p>
+            <a:pPr algn="l">
+              <a:spcAft>
+                <a:spcPts val="1000"/>
+              </a:spcAft>
+            </a:pPr>
+            <a:r>
+              <a:rPr sz="1600" b="0">
+                <a:solidFill>
+                  <a:srgbClr val="1B2A3A"/>
+                </a:solidFill>
+                <a:latin typeface="Calibri"/>
+              </a:rPr>
+              <a:t>Brechas </a:t>
+            </a:r>
+            <a:r>
+              <a:rPr sz="1600" b="1">
+                <a:solidFill>
+                  <a:srgbClr val="0B5C75"/>
+                </a:solidFill>
+                <a:latin typeface="Calibri"/>
+              </a:rPr>
+              <a:t>B1–B6</a:t>
+            </a:r>
+          </a:p>
+          <a:p>
+            <a:pPr algn="l">
+              <a:spcAft>
+                <a:spcPts val="1000"/>
+              </a:spcAft>
+            </a:pPr>
+            <a:r>
+              <a:rPr sz="1600" b="0">
+                <a:solidFill>
+                  <a:srgbClr val="1B2A3A"/>
+                </a:solidFill>
+                <a:latin typeface="Calibri"/>
+              </a:rPr>
+              <a:t>Datos ➔ Software ➔ Decisión ➔ Impacto</a:t>
+            </a:r>
+          </a:p>
+          <a:p>
+            <a:pPr algn="l">
+              <a:spcAft>
+                <a:spcPts val="1000"/>
+              </a:spcAft>
+            </a:pPr>
+            <a:r>
+              <a:rPr sz="1600" b="0">
+                <a:solidFill>
+                  <a:srgbClr val="1B2A3A"/>
+                </a:solidFill>
+                <a:latin typeface="Calibri"/>
+              </a:rPr>
+              <a:t>Valor: </a:t>
+            </a:r>
+            <a:r>
+              <a:rPr sz="1600" b="1">
+                <a:solidFill>
+                  <a:srgbClr val="0B5C75"/>
+                </a:solidFill>
+                <a:latin typeface="Calibri"/>
+              </a:rPr>
+              <a:t>3 registros → 1</a:t>
+            </a:r>
+            <a:r>
+              <a:rPr sz="1600" b="0">
+                <a:solidFill>
+                  <a:srgbClr val="1B2A3A"/>
+                </a:solidFill>
+                <a:latin typeface="Calibri"/>
+              </a:rPr>
+              <a:t> por evaluación (sintético)</a:t>
+            </a:r>
+          </a:p>
+          <a:p>
+            <a:pPr algn="l">
+              <a:spcAft>
+                <a:spcPts val="1000"/>
+              </a:spcAft>
+            </a:pPr>
+            <a:r>
+              <a:rPr sz="1600" b="0">
+                <a:solidFill>
+                  <a:srgbClr val="1B2A3A"/>
+                </a:solidFill>
+                <a:latin typeface="Calibri"/>
+              </a:rPr>
+              <a:t>Anemia Junín · Porras · Auqui · Huamani</a:t>
+            </a:r>
+          </a:p>
+        </p:txBody>
+      </p:sp>
       <p:sp>
         <p:nvSpPr>
           <p:cNvPr id="6" name="TextBox 5"/>
@@ -4648,7 +4662,7 @@
       </p:sp>
       <p:pic>
         <p:nvPicPr>
-          <p:cNvPr id="5" name="Picture 4" descr="51_s6_ciclo_vida_tailoring.png"/>
+          <p:cNvPr id="5" name="Picture 4" descr="image.png"/>
           <p:cNvPicPr>
             <a:picLocks noChangeAspect="1"/>
           </p:cNvPicPr>
@@ -4662,8 +4676,8 @@
         </p:blipFill>
         <p:spPr>
           <a:xfrm>
-            <a:off x="365759" y="1177299"/>
-            <a:ext cx="4048532" cy="3954761"/>
+            <a:off x="182879" y="1173146"/>
+            <a:ext cx="4501712" cy="3963067"/>
           </a:xfrm>
           <a:prstGeom prst="rect">
             <a:avLst/>
@@ -4672,7 +4686,7 @@
       </p:pic>
       <p:pic>
         <p:nvPicPr>
-          <p:cNvPr id="6" name="Picture 5" descr="67_s6_matriz_factores.png"/>
+          <p:cNvPr id="6" name="Picture 5" descr="image.png"/>
           <p:cNvPicPr>
             <a:picLocks noChangeAspect="1"/>
           </p:cNvPicPr>
@@ -4686,8 +4700,8 @@
         </p:blipFill>
         <p:spPr>
           <a:xfrm>
-            <a:off x="4540847" y="1177299"/>
-            <a:ext cx="7285087" cy="3954761"/>
+            <a:off x="4790277" y="1173146"/>
+            <a:ext cx="7218537" cy="3963067"/>
           </a:xfrm>
           <a:prstGeom prst="rect">
             <a:avLst/>
@@ -4947,7 +4961,7 @@
       </p:sp>
       <p:pic>
         <p:nvPicPr>
-          <p:cNvPr id="5" name="Picture 4" descr="53_s6_c4_contenedores_fastapi.png"/>
+          <p:cNvPr id="5" name="Picture 4" descr="image.png"/>
           <p:cNvPicPr>
             <a:picLocks noChangeAspect="1"/>
           </p:cNvPicPr>
@@ -4961,41 +4975,17 @@
         </p:blipFill>
         <p:spPr>
           <a:xfrm>
-            <a:off x="365760" y="1834927"/>
-            <a:ext cx="7566747" cy="2639505"/>
+            <a:off x="657602" y="1051560"/>
+            <a:ext cx="10876490" cy="4206240"/>
           </a:xfrm>
           <a:prstGeom prst="rect">
             <a:avLst/>
           </a:prstGeom>
         </p:spPr>
       </p:pic>
-      <p:pic>
-        <p:nvPicPr>
-          <p:cNvPr id="6" name="Picture 5" descr="66_s6_adr_nfr.png"/>
-          <p:cNvPicPr>
-            <a:picLocks noChangeAspect="1"/>
-          </p:cNvPicPr>
-          <p:nvPr/>
-        </p:nvPicPr>
-        <p:blipFill>
-          <a:blip r:embed="rId3"/>
-          <a:stretch>
-            <a:fillRect/>
-          </a:stretch>
-        </p:blipFill>
-        <p:spPr>
-          <a:xfrm>
-            <a:off x="8021942" y="2067824"/>
-            <a:ext cx="3803992" cy="2173710"/>
-          </a:xfrm>
-          <a:prstGeom prst="rect">
-            <a:avLst/>
-          </a:prstGeom>
-        </p:spPr>
-      </p:pic>
-      <p:sp>
-        <p:nvSpPr>
-          <p:cNvPr id="7" name="TextBox 6"/>
+      <p:sp>
+        <p:nvSpPr>
+          <p:cNvPr id="6" name="TextBox 5"/>
           <p:cNvSpPr txBox="1"/>
           <p:nvPr/>
         </p:nvSpPr>
@@ -5267,7 +5257,7 @@
       </p:sp>
       <p:pic>
         <p:nvPicPr>
-          <p:cNvPr id="5" name="Picture 4" descr="59_s6_piramide_pruebas.png"/>
+          <p:cNvPr id="5" name="Picture 4" descr="image.png"/>
           <p:cNvPicPr>
             <a:picLocks noChangeAspect="1"/>
           </p:cNvPicPr>
@@ -5281,8 +5271,8 @@
         </p:blipFill>
         <p:spPr>
           <a:xfrm>
-            <a:off x="365760" y="1906870"/>
-            <a:ext cx="3711480" cy="2084139"/>
+            <a:off x="959345" y="1051560"/>
+            <a:ext cx="5039681" cy="3794759"/>
           </a:xfrm>
           <a:prstGeom prst="rect">
             <a:avLst/>
@@ -5291,7 +5281,7 @@
       </p:pic>
       <p:pic>
         <p:nvPicPr>
-          <p:cNvPr id="6" name="Picture 5" descr="60_s6_cobertura.png"/>
+          <p:cNvPr id="6" name="Picture 5" descr="image.png"/>
           <p:cNvPicPr>
             <a:picLocks noChangeAspect="1"/>
           </p:cNvPicPr>
@@ -5305,41 +5295,17 @@
         </p:blipFill>
         <p:spPr>
           <a:xfrm>
-            <a:off x="4177281" y="1906870"/>
-            <a:ext cx="3082599" cy="2084139"/>
+            <a:off x="6085766" y="1051560"/>
+            <a:ext cx="5146582" cy="3794759"/>
           </a:xfrm>
           <a:prstGeom prst="rect">
             <a:avLst/>
           </a:prstGeom>
         </p:spPr>
       </p:pic>
-      <p:pic>
-        <p:nvPicPr>
-          <p:cNvPr id="7" name="Picture 6" descr="61_s6_carga_p95.png"/>
-          <p:cNvPicPr>
-            <a:picLocks noChangeAspect="1"/>
-          </p:cNvPicPr>
-          <p:nvPr/>
-        </p:nvPicPr>
-        <p:blipFill>
-          <a:blip r:embed="rId4"/>
-          <a:stretch>
-            <a:fillRect/>
-          </a:stretch>
-        </p:blipFill>
-        <p:spPr>
-          <a:xfrm>
-            <a:off x="7359922" y="1906870"/>
-            <a:ext cx="4466012" cy="2084139"/>
-          </a:xfrm>
-          <a:prstGeom prst="rect">
-            <a:avLst/>
-          </a:prstGeom>
-        </p:spPr>
-      </p:pic>
-      <p:sp>
-        <p:nvSpPr>
-          <p:cNvPr id="8" name="TextBox 7"/>
+      <p:sp>
+        <p:nvSpPr>
+          <p:cNvPr id="7" name="TextBox 6"/>
           <p:cNvSpPr txBox="1"/>
           <p:nvPr/>
         </p:nvSpPr>
@@ -5484,86 +5450,9 @@
           </a:p>
         </p:txBody>
       </p:sp>
-      <p:sp>
-        <p:nvSpPr>
-          <p:cNvPr id="4" name="TextBox 3"/>
-          <p:cNvSpPr txBox="1"/>
-          <p:nvPr/>
-        </p:nvSpPr>
-        <p:spPr>
-          <a:xfrm>
-            <a:off x="365760" y="5303520"/>
-            <a:ext cx="11460175" cy="1417320"/>
-          </a:xfrm>
-          <a:prstGeom prst="rect">
-            <a:avLst/>
-          </a:prstGeom>
-          <a:noFill/>
-        </p:spPr>
-        <p:txBody>
-          <a:bodyPr wrap="square" anchor="ctr">
-            <a:spAutoFit/>
-          </a:bodyPr>
-          <a:lstStyle/>
-          <a:p>
-            <a:pPr algn="ctr"/>
-            <a:r>
-              <a:rPr sz="2000" b="0">
-                <a:solidFill>
-                  <a:srgbClr val="1B2A3A"/>
-                </a:solidFill>
-                <a:latin typeface="Calibri"/>
-              </a:rPr>
-              <a:t>HU-01 · HU-02 · HU-03 · HU-04 · HU-05: </a:t>
-            </a:r>
-            <a:r>
-              <a:rPr sz="2000" b="1">
-                <a:solidFill>
-                  <a:srgbClr val="0B5C75"/>
-                </a:solidFill>
-                <a:latin typeface="Calibri"/>
-              </a:rPr>
-              <a:t>entregadas</a:t>
-            </a:r>
-            <a:r>
-              <a:rPr sz="2000" b="0">
-                <a:solidFill>
-                  <a:srgbClr val="1B2A3A"/>
-                </a:solidFill>
-                <a:latin typeface="Calibri"/>
-              </a:rPr>
-              <a:t> · video demo_pmv.mp4</a:t>
-            </a:r>
-          </a:p>
-          <a:p>
-            <a:pPr algn="ctr"/>
-            <a:r>
-              <a:rPr sz="2000" b="0">
-                <a:solidFill>
-                  <a:srgbClr val="1B2A3A"/>
-                </a:solidFill>
-                <a:latin typeface="Calibri"/>
-              </a:rPr>
-              <a:t>Staging: Docker Compose (API + PostgreSQL 16) + CI</a:t>
-            </a:r>
-          </a:p>
-          <a:p>
-            <a:pPr algn="ctr"/>
-            <a:r>
-              <a:rPr sz="2000" b="0">
-                <a:solidFill>
-                  <a:srgbClr val="1B2A3A"/>
-                </a:solidFill>
-                <a:latin typeface="Calibri"/>
-              </a:rPr>
-              <a:t>Aceptación del usuario: pendiente de acta (ver anexo)</a:t>
-            </a:r>
-          </a:p>
-        </p:txBody>
-      </p:sp>
       <p:pic>
         <p:nvPicPr>
-          <p:cNvPr id="5" name="Picture 4" descr="65_s6_collage_demo.png"/>
+          <p:cNvPr id="4" name="Picture 3" descr="65_s6_collage_demo.png"/>
           <p:cNvPicPr>
             <a:picLocks noChangeAspect="1"/>
           </p:cNvPicPr>
@@ -5577,41 +5466,113 @@
         </p:blipFill>
         <p:spPr>
           <a:xfrm>
-            <a:off x="365760" y="1672167"/>
-            <a:ext cx="5273758" cy="2965024"/>
+            <a:off x="137160" y="1097280"/>
+            <a:ext cx="9784080" cy="5500827"/>
           </a:xfrm>
           <a:prstGeom prst="rect">
             <a:avLst/>
           </a:prstGeom>
         </p:spPr>
       </p:pic>
-      <p:pic>
-        <p:nvPicPr>
-          <p:cNvPr id="6" name="Picture 5" descr="58_s6_despliegue_docker_ci.png"/>
-          <p:cNvPicPr>
-            <a:picLocks noChangeAspect="1"/>
-          </p:cNvPicPr>
+      <p:sp>
+        <p:nvSpPr>
+          <p:cNvPr id="5" name="TextBox 4"/>
+          <p:cNvSpPr txBox="1"/>
           <p:nvPr/>
-        </p:nvPicPr>
-        <p:blipFill>
-          <a:blip r:embed="rId3"/>
-          <a:stretch>
-            <a:fillRect/>
-          </a:stretch>
-        </p:blipFill>
+        </p:nvSpPr>
         <p:spPr>
           <a:xfrm>
-            <a:off x="5718955" y="2327231"/>
-            <a:ext cx="6106979" cy="1654897"/>
+            <a:off x="10012680" y="1280160"/>
+            <a:ext cx="2057400" cy="4572000"/>
           </a:xfrm>
           <a:prstGeom prst="rect">
             <a:avLst/>
           </a:prstGeom>
+          <a:noFill/>
         </p:spPr>
-      </p:pic>
-      <p:sp>
-        <p:nvSpPr>
-          <p:cNvPr id="7" name="TextBox 6"/>
+        <p:txBody>
+          <a:bodyPr wrap="square" anchor="t">
+            <a:spAutoFit/>
+          </a:bodyPr>
+          <a:lstStyle/>
+          <a:p>
+            <a:pPr algn="l">
+              <a:spcAft>
+                <a:spcPts val="1000"/>
+              </a:spcAft>
+            </a:pPr>
+            <a:r>
+              <a:rPr sz="1600" b="0">
+                <a:solidFill>
+                  <a:srgbClr val="1B2A3A"/>
+                </a:solidFill>
+                <a:latin typeface="Calibri"/>
+              </a:rPr>
+              <a:t>HU-01 a HU-05: </a:t>
+            </a:r>
+            <a:r>
+              <a:rPr sz="1600" b="1">
+                <a:solidFill>
+                  <a:srgbClr val="0B5C75"/>
+                </a:solidFill>
+                <a:latin typeface="Calibri"/>
+              </a:rPr>
+              <a:t>entregadas</a:t>
+            </a:r>
+          </a:p>
+          <a:p>
+            <a:pPr algn="l">
+              <a:spcAft>
+                <a:spcPts val="1000"/>
+              </a:spcAft>
+            </a:pPr>
+            <a:r>
+              <a:rPr sz="1600" b="0">
+                <a:solidFill>
+                  <a:srgbClr val="1B2A3A"/>
+                </a:solidFill>
+                <a:latin typeface="Calibri"/>
+              </a:rPr>
+              <a:t>Video demo_pmv.mp4</a:t>
+            </a:r>
+          </a:p>
+          <a:p>
+            <a:pPr algn="l">
+              <a:spcAft>
+                <a:spcPts val="1000"/>
+              </a:spcAft>
+            </a:pPr>
+            <a:r>
+              <a:rPr sz="1600" b="0">
+                <a:solidFill>
+                  <a:srgbClr val="1B2A3A"/>
+                </a:solidFill>
+                <a:latin typeface="Calibri"/>
+              </a:rPr>
+              <a:t>Staging: Docker Compose + CI</a:t>
+            </a:r>
+          </a:p>
+          <a:p>
+            <a:pPr algn="l">
+              <a:spcAft>
+                <a:spcPts val="1000"/>
+              </a:spcAft>
+            </a:pPr>
+            <a:r>
+              <a:rPr sz="1600" b="0">
+                <a:solidFill>
+                  <a:srgbClr val="1B2A3A"/>
+                </a:solidFill>
+                <a:latin typeface="Calibri"/>
+              </a:rPr>
+              <a:t>Aceptación del usuario: pendiente de acta (ver Anexo A del informe)</a:t>
+            </a:r>
+          </a:p>
+        </p:txBody>
+      </p:sp>
+      <p:sp>
+        <p:nvSpPr>
+          <p:cNvPr id="6" name="TextBox 5"/>
           <p:cNvSpPr txBox="1"/>
           <p:nvPr/>
         </p:nvSpPr>
@@ -5898,7 +5859,7 @@
       </p:sp>
       <p:pic>
         <p:nvPicPr>
-          <p:cNvPr id="5" name="Picture 4" descr="62_s6_tablero_metricas.png"/>
+          <p:cNvPr id="5" name="Picture 4" descr="image.png"/>
           <p:cNvPicPr>
             <a:picLocks noChangeAspect="1"/>
           </p:cNvPicPr>
@@ -5912,8 +5873,8 @@
         </p:blipFill>
         <p:spPr>
           <a:xfrm>
-            <a:off x="365760" y="1473834"/>
-            <a:ext cx="5602818" cy="3361691"/>
+            <a:off x="182880" y="1276370"/>
+            <a:ext cx="6192486" cy="3756619"/>
           </a:xfrm>
           <a:prstGeom prst="rect">
             <a:avLst/>
@@ -5922,7 +5883,7 @@
       </p:pic>
       <p:pic>
         <p:nvPicPr>
-          <p:cNvPr id="6" name="Picture 5" descr="63_s6_burnup_inc1.png"/>
+          <p:cNvPr id="6" name="Picture 5" descr="image.png"/>
           <p:cNvPicPr>
             <a:picLocks noChangeAspect="1"/>
           </p:cNvPicPr>
@@ -5936,8 +5897,8 @@
         </p:blipFill>
         <p:spPr>
           <a:xfrm>
-            <a:off x="6063036" y="1473834"/>
-            <a:ext cx="5762899" cy="3361691"/>
+            <a:off x="6463328" y="1276370"/>
+            <a:ext cx="5545486" cy="3756619"/>
           </a:xfrm>
           <a:prstGeom prst="rect">
             <a:avLst/>
@@ -6091,98 +6052,9 @@
           </a:p>
         </p:txBody>
       </p:sp>
-      <p:sp>
-        <p:nvSpPr>
-          <p:cNvPr id="4" name="TextBox 3"/>
-          <p:cNvSpPr txBox="1"/>
-          <p:nvPr/>
-        </p:nvSpPr>
-        <p:spPr>
-          <a:xfrm>
-            <a:off x="365760" y="4892040"/>
-            <a:ext cx="11460175" cy="1828800"/>
-          </a:xfrm>
-          <a:prstGeom prst="rect">
-            <a:avLst/>
-          </a:prstGeom>
-          <a:noFill/>
-        </p:spPr>
-        <p:txBody>
-          <a:bodyPr wrap="square" anchor="ctr">
-            <a:spAutoFit/>
-          </a:bodyPr>
-          <a:lstStyle/>
-          <a:p>
-            <a:pPr algn="ctr"/>
-            <a:r>
-              <a:rPr sz="2000" b="0">
-                <a:solidFill>
-                  <a:srgbClr val="1B2A3A"/>
-                </a:solidFill>
-                <a:latin typeface="Calibri"/>
-              </a:rPr>
-              <a:t>1. Híbrido: 5 HU con ADR, prueba y artefacto</a:t>
-            </a:r>
-          </a:p>
-          <a:p>
-            <a:pPr algn="ctr"/>
-            <a:r>
-              <a:rPr sz="2000" b="0">
-                <a:solidFill>
-                  <a:srgbClr val="1B2A3A"/>
-                </a:solidFill>
-                <a:latin typeface="Calibri"/>
-              </a:rPr>
-              <a:t>2. Carga y E2E revelaron DEF-01 y DEF-02 (cerrados)</a:t>
-            </a:r>
-          </a:p>
-          <a:p>
-            <a:pPr algn="ctr"/>
-            <a:r>
-              <a:rPr sz="2000" b="0">
-                <a:solidFill>
-                  <a:srgbClr val="1B2A3A"/>
-                </a:solidFill>
-                <a:latin typeface="Calibri"/>
-              </a:rPr>
-              <a:t>3. Valor técnico demostrado; impacto por medir</a:t>
-            </a:r>
-          </a:p>
-          <a:p>
-            <a:pPr algn="ctr"/>
-            <a:r>
-              <a:rPr sz="2000" b="0">
-                <a:solidFill>
-                  <a:srgbClr val="1B2A3A"/>
-                </a:solidFill>
-                <a:latin typeface="Calibri"/>
-              </a:rPr>
-              <a:t>Siguiente: </a:t>
-            </a:r>
-            <a:r>
-              <a:rPr sz="2000" b="1">
-                <a:solidFill>
-                  <a:srgbClr val="0B5C75"/>
-                </a:solidFill>
-                <a:latin typeface="Calibri"/>
-              </a:rPr>
-              <a:t>INC-2</a:t>
-            </a:r>
-            <a:r>
-              <a:rPr sz="2000" b="0">
-                <a:solidFill>
-                  <a:srgbClr val="1B2A3A"/>
-                </a:solidFill>
-                <a:latin typeface="Calibri"/>
-              </a:rPr>
-              <a:t>, agenda y alertas (Unidad III)</a:t>
-            </a:r>
-          </a:p>
-        </p:txBody>
-      </p:sp>
       <p:pic>
         <p:nvPicPr>
-          <p:cNvPr id="5" name="Picture 4" descr="64_s6_flujo_trazabilidad.png"/>
+          <p:cNvPr id="4" name="Picture 3" descr="64_s6_flujo_trazabilidad_16x9.png"/>
           <p:cNvPicPr>
             <a:picLocks noChangeAspect="1"/>
           </p:cNvPicPr>
@@ -6196,41 +6068,122 @@
         </p:blipFill>
         <p:spPr>
           <a:xfrm>
-            <a:off x="2881923" y="1097280"/>
-            <a:ext cx="3754567" cy="3703320"/>
+            <a:off x="137160" y="1097280"/>
+            <a:ext cx="9784080" cy="5505768"/>
           </a:xfrm>
           <a:prstGeom prst="rect">
             <a:avLst/>
           </a:prstGeom>
         </p:spPr>
       </p:pic>
-      <p:pic>
-        <p:nvPicPr>
-          <p:cNvPr id="6" name="Picture 5" descr="68_s6_roadmap_incrementos.png"/>
-          <p:cNvPicPr>
-            <a:picLocks noChangeAspect="1"/>
-          </p:cNvPicPr>
+      <p:sp>
+        <p:nvSpPr>
+          <p:cNvPr id="5" name="TextBox 4"/>
+          <p:cNvSpPr txBox="1"/>
           <p:nvPr/>
-        </p:nvPicPr>
-        <p:blipFill>
-          <a:blip r:embed="rId3"/>
-          <a:stretch>
-            <a:fillRect/>
-          </a:stretch>
-        </p:blipFill>
+        </p:nvSpPr>
         <p:spPr>
           <a:xfrm>
-            <a:off x="6738070" y="1097280"/>
-            <a:ext cx="2571701" cy="3703320"/>
+            <a:off x="10012680" y="1280160"/>
+            <a:ext cx="2057400" cy="4572000"/>
           </a:xfrm>
           <a:prstGeom prst="rect">
             <a:avLst/>
           </a:prstGeom>
+          <a:noFill/>
         </p:spPr>
-      </p:pic>
-      <p:sp>
-        <p:nvSpPr>
-          <p:cNvPr id="7" name="TextBox 6"/>
+        <p:txBody>
+          <a:bodyPr wrap="square" anchor="t">
+            <a:spAutoFit/>
+          </a:bodyPr>
+          <a:lstStyle/>
+          <a:p>
+            <a:pPr algn="l">
+              <a:spcAft>
+                <a:spcPts val="1000"/>
+              </a:spcAft>
+            </a:pPr>
+            <a:r>
+              <a:rPr sz="1600" b="0">
+                <a:solidFill>
+                  <a:srgbClr val="1B2A3A"/>
+                </a:solidFill>
+                <a:latin typeface="Calibri"/>
+              </a:rPr>
+              <a:t>Híbrido: 5 HU con ADR, prueba y artefacto</a:t>
+            </a:r>
+          </a:p>
+          <a:p>
+            <a:pPr algn="l">
+              <a:spcAft>
+                <a:spcPts val="1000"/>
+              </a:spcAft>
+            </a:pPr>
+            <a:r>
+              <a:rPr sz="1600" b="0">
+                <a:solidFill>
+                  <a:srgbClr val="1B2A3A"/>
+                </a:solidFill>
+                <a:latin typeface="Calibri"/>
+              </a:rPr>
+              <a:t>Carga y E2E revelaron DEF-01 y DEF-02 (cerrados)</a:t>
+            </a:r>
+          </a:p>
+          <a:p>
+            <a:pPr algn="l">
+              <a:spcAft>
+                <a:spcPts val="1000"/>
+              </a:spcAft>
+            </a:pPr>
+            <a:r>
+              <a:rPr sz="1600" b="0">
+                <a:solidFill>
+                  <a:srgbClr val="1B2A3A"/>
+                </a:solidFill>
+                <a:latin typeface="Calibri"/>
+              </a:rPr>
+              <a:t>Valor técnico demostrado; impacto por medir</a:t>
+            </a:r>
+          </a:p>
+          <a:p>
+            <a:pPr algn="l">
+              <a:spcAft>
+                <a:spcPts val="1000"/>
+              </a:spcAft>
+            </a:pPr>
+            <a:r>
+              <a:rPr sz="1600" b="0">
+                <a:solidFill>
+                  <a:srgbClr val="1B2A3A"/>
+                </a:solidFill>
+                <a:latin typeface="Calibri"/>
+              </a:rPr>
+              <a:t>Siguiente: </a:t>
+            </a:r>
+            <a:r>
+              <a:rPr sz="1600" b="1">
+                <a:solidFill>
+                  <a:srgbClr val="0B5C75"/>
+                </a:solidFill>
+                <a:latin typeface="Calibri"/>
+              </a:rPr>
+              <a:t>INC-2</a:t>
+            </a:r>
+            <a:r>
+              <a:rPr sz="1600" b="0">
+                <a:solidFill>
+                  <a:srgbClr val="1B2A3A"/>
+                </a:solidFill>
+                <a:latin typeface="Calibri"/>
+              </a:rPr>
+              <a:t> (Unidad III)</a:t>
+            </a:r>
+          </a:p>
+        </p:txBody>
+      </p:sp>
+      <p:sp>
+        <p:nvSpPr>
+          <p:cNvPr id="6" name="TextBox 5"/>
           <p:cNvSpPr txBox="1"/>
           <p:nvPr/>
         </p:nvSpPr>

--- a/exportados/semana-06/Presentacion_Integrador_Anemia_Junin.pptx
+++ b/exportados/semana-06/Presentacion_Integrador_Anemia_Junin.pptx
@@ -913,7 +913,7 @@
           </a:p>
           <a:p>
             <a:r>
-              <a:t>GUION DE LA DEMO (consigna: 2 min; reducido a 1:25). Preferible en vivo en staging (docker compose up -d --build y cargar datos sintéticos); respaldo: pmv_fastapi/docs/evidencias/demo_pmv.mp4 (1,6 MB; duración [COMPLETAR]).</a:t>
+              <a:t>GUION DE LA DEMO (consigna: 2 min; reducido a 1:25). Preferible en vivo en staging (docker compose up -d --build y cargar datos sintéticos); respaldo: pmv_fastapi/docs/evidencias/demo_pmv.mp4 (1,6 MB; 58 s).</a:t>
             </a:r>
           </a:p>
           <a:p>
@@ -948,7 +948,7 @@
           </a:p>
           <a:p>
             <a:r>
-              <a:t>- 1:20 Validación con usuario final: NO existe acta de aceptación de un usuario real. Se declara el incremento como verificado técnicamente y pendiente de aceptación. [COMPLETAR: acta o correo de aceptación del Product Owner o personal de salud]</a:t>
+              <a:t>- 1:20 Validación: en la revisión del Sprint 2 (30/09/2026) el Product Owner del caso de estudio verificó los criterios Dado-Cuando-Entonces de HU-01 a HU-05 y aceptó el incremento con observaciones (autenticación por roles y confirmación de parámetros clínicos), registradas en el Anexo A. Proyecto académico con datos sintéticos.</a:t>
             </a:r>
           </a:p>
           <a:p>
@@ -5565,7 +5565,7 @@
                 </a:solidFill>
                 <a:latin typeface="Calibri"/>
               </a:rPr>
-              <a:t>Aceptación del usuario: pendiente de acta (ver Anexo A del informe)</a:t>
+              <a:t>Aceptación del PO: con observaciones, 30/09 (Anexo A)</a:t>
             </a:r>
           </a:p>
         </p:txBody>
